--- a/ppt/IoTAI04-MachineLearning.pptx
+++ b/ppt/IoTAI04-MachineLearning.pptx
@@ -3708,21 +3708,49 @@
             <a:pPr eaLnBrk="1" hangingPunct="1"/>
             <a:r>
               <a:rPr lang="fr-FR" altLang="fr-FR" dirty="0"/>
-              <a:t>Chapitre 11</a:t>
-            </a:r>
-          </a:p>
-          <a:p>
-            <a:pPr eaLnBrk="1" hangingPunct="1"/>
-            <a:r>
-              <a:rPr lang="fr-FR" altLang="fr-FR" dirty="0"/>
               <a:t>Machine Learning</a:t>
+            </a:r>
+          </a:p>
+        </p:txBody>
+      </p:sp>
+      <p:sp>
+        <p:nvSpPr>
+          <p:cNvPr id="3" name="ZoneTexte 2"/>
+          <p:cNvSpPr txBox="1"/>
+          <p:nvPr/>
+        </p:nvSpPr>
+        <p:spPr>
+          <a:xfrm>
+            <a:off x="3107495" y="2132856"/>
+            <a:ext cx="2929007" cy="646331"/>
+          </a:xfrm>
+          <a:prstGeom prst="rect">
+            <a:avLst/>
+          </a:prstGeom>
+          <a:noFill/>
+        </p:spPr>
+        <p:txBody>
+          <a:bodyPr wrap="none" rtlCol="0">
+            <a:spAutoFit/>
+          </a:bodyPr>
+          <a:lstStyle/>
+          <a:p>
+            <a:r>
+              <a:rPr lang="fr-FR" sz="3600" dirty="0"/>
+              <a:t>Data Science</a:t>
             </a:r>
           </a:p>
         </p:txBody>
       </p:sp>
       <p:pic>
         <p:nvPicPr>
-          <p:cNvPr id="2" name="Image 1"/>
+          <p:cNvPr id="5" name="Image 4">
+            <a:extLst>
+              <a:ext uri="{FF2B5EF4-FFF2-40B4-BE49-F238E27FC236}">
+                <a16:creationId xmlns:a16="http://schemas.microsoft.com/office/drawing/2014/main" id="{5485807D-22C2-F8BC-0CC4-6942A04CAFA7}"/>
+              </a:ext>
+            </a:extLst>
+          </p:cNvPr>
           <p:cNvPicPr>
             <a:picLocks noChangeAspect="1"/>
           </p:cNvPicPr>
@@ -3736,43 +3764,14 @@
         </p:blipFill>
         <p:spPr>
           <a:xfrm>
-            <a:off x="1214437" y="5023445"/>
-            <a:ext cx="6715125" cy="1285875"/>
+            <a:off x="3155589" y="4710545"/>
+            <a:ext cx="2905530" cy="1695687"/>
           </a:xfrm>
           <a:prstGeom prst="rect">
             <a:avLst/>
           </a:prstGeom>
         </p:spPr>
       </p:pic>
-      <p:sp>
-        <p:nvSpPr>
-          <p:cNvPr id="3" name="ZoneTexte 2"/>
-          <p:cNvSpPr txBox="1"/>
-          <p:nvPr/>
-        </p:nvSpPr>
-        <p:spPr>
-          <a:xfrm>
-            <a:off x="3107495" y="2132856"/>
-            <a:ext cx="2929007" cy="646331"/>
-          </a:xfrm>
-          <a:prstGeom prst="rect">
-            <a:avLst/>
-          </a:prstGeom>
-          <a:noFill/>
-        </p:spPr>
-        <p:txBody>
-          <a:bodyPr wrap="none" rtlCol="0">
-            <a:spAutoFit/>
-          </a:bodyPr>
-          <a:lstStyle/>
-          <a:p>
-            <a:r>
-              <a:rPr lang="fr-FR" sz="3600" dirty="0"/>
-              <a:t>Data Science</a:t>
-            </a:r>
-          </a:p>
-        </p:txBody>
-      </p:sp>
     </p:spTree>
   </p:cSld>
   <p:clrMapOvr>
